--- a/catalog/samples/issue_to_solution_map.pptx
+++ b/catalog/samples/issue_to_solution_map.pptx
@@ -1222,7 +1222,7 @@
           </a:p>
           <a:p>
             <a:r>
-              <a:t>  "template_sha256": "c5202847ac070b38ed37d55cdda2ef65896099e6dc3e9f766e78c2aa111d11b8"</a:t>
+              <a:t>  "template_sha256": "894e243364b0d6561e6718c865b26e5393e3227b9baa874baf2745419537714d"</a:t>
             </a:r>
           </a:p>
           <a:p>
